--- a/Presentation/Presentation.pptx
+++ b/Presentation/Presentation.pptx
@@ -28547,7 +28547,7 @@
                 <a:ea typeface="Calibri" pitchFamily="34" charset="-122"/>
                 <a:cs typeface="Calibri" pitchFamily="34" charset="-120"/>
               </a:rPr>
-              <a:t>ML / AI</a:t>
+              <a:t>Prediction</a:t>
             </a:r>
             <a:endParaRPr lang="en-US" sz="750" dirty="0"/>
           </a:p>
@@ -28586,7 +28586,7 @@
                 <a:ea typeface="Calibri" pitchFamily="34" charset="-122"/>
                 <a:cs typeface="Calibri" pitchFamily="34" charset="-120"/>
               </a:rPr>
-              <a:t>Random Forest Predicts 29 At-Risk SKUs</a:t>
+              <a:t>Prediction At-Risk SKUs</a:t>
             </a:r>
             <a:endParaRPr lang="en-US" sz="1100" dirty="0"/>
           </a:p>
@@ -28625,7 +28625,7 @@
                 <a:ea typeface="Calibri" pitchFamily="34" charset="-122"/>
                 <a:cs typeface="Calibri" pitchFamily="34" charset="-120"/>
               </a:rPr>
-              <a:t>Machine Learning model trained to predict Stock Shortage risk.</a:t>
+              <a:t>We predicted Stock Shortage risk.</a:t>
             </a:r>
             <a:endParaRPr lang="en-US" sz="950" dirty="0"/>
           </a:p>
